--- a/assets/courses/ai-augmented-se/FPGAPA_AIAugmentedSE_Week03_Requirements.pptx
+++ b/assets/courses/ai-augmented-se/FPGAPA_AIAugmentedSE_Week03_Requirements.pptx
@@ -1745,7 +1745,7 @@
       </p:sp>
       <p:pic>
         <p:nvPicPr>
-          <p:cNvPr id="5" name="Image 0" descr="preencoded.png">    </p:cNvPr>
+          <p:cNvPr id="5" name="Image 0" descr="preencoded.png"/>
           <p:cNvPicPr>
             <a:picLocks noChangeAspect="1"/>
           </p:cNvPicPr>
@@ -2105,7 +2105,7 @@
       </p:sp>
       <p:pic>
         <p:nvPicPr>
-          <p:cNvPr id="3" name="Image 0" descr="preencoded.png">    </p:cNvPr>
+          <p:cNvPr id="3" name="Image 0" descr="preencoded.png"/>
           <p:cNvPicPr>
             <a:picLocks noChangeAspect="1"/>
           </p:cNvPicPr>
@@ -2291,7 +2291,7 @@
       </p:sp>
       <p:pic>
         <p:nvPicPr>
-          <p:cNvPr id="9" name="Image 1" descr="preencoded.png">    </p:cNvPr>
+          <p:cNvPr id="9" name="Image 1" descr="preencoded.png"/>
           <p:cNvPicPr>
             <a:picLocks noChangeAspect="1"/>
           </p:cNvPicPr>
@@ -2457,7 +2457,7 @@
       </p:sp>
       <p:pic>
         <p:nvPicPr>
-          <p:cNvPr id="14" name="Image 2" descr="preencoded.png">    </p:cNvPr>
+          <p:cNvPr id="14" name="Image 2" descr="preencoded.png"/>
           <p:cNvPicPr>
             <a:picLocks noChangeAspect="1"/>
           </p:cNvPicPr>
@@ -2623,7 +2623,7 @@
       </p:sp>
       <p:pic>
         <p:nvPicPr>
-          <p:cNvPr id="19" name="Image 3" descr="preencoded.png">    </p:cNvPr>
+          <p:cNvPr id="19" name="Image 3" descr="preencoded.png"/>
           <p:cNvPicPr>
             <a:picLocks noChangeAspect="1"/>
           </p:cNvPicPr>
@@ -2879,7 +2879,7 @@
       </p:sp>
       <p:pic>
         <p:nvPicPr>
-          <p:cNvPr id="3" name="Image 0" descr="preencoded.png">    </p:cNvPr>
+          <p:cNvPr id="3" name="Image 0" descr="preencoded.png"/>
           <p:cNvPicPr>
             <a:picLocks noChangeAspect="1"/>
           </p:cNvPicPr>
@@ -4007,7 +4007,7 @@
       </p:sp>
       <p:pic>
         <p:nvPicPr>
-          <p:cNvPr id="3" name="Image 0" descr="preencoded.png">    </p:cNvPr>
+          <p:cNvPr id="3" name="Image 0" descr="preencoded.png"/>
           <p:cNvPicPr>
             <a:picLocks noChangeAspect="1"/>
           </p:cNvPicPr>
@@ -4688,7 +4688,7 @@
       </p:sp>
       <p:pic>
         <p:nvPicPr>
-          <p:cNvPr id="3" name="Image 0" descr="preencoded.png">    </p:cNvPr>
+          <p:cNvPr id="3" name="Image 0" descr="preencoded.png"/>
           <p:cNvPicPr>
             <a:picLocks noChangeAspect="1"/>
           </p:cNvPicPr>
@@ -4869,7 +4869,7 @@
       </p:sp>
       <p:pic>
         <p:nvPicPr>
-          <p:cNvPr id="9" name="Image 1" descr="preencoded.png">    </p:cNvPr>
+          <p:cNvPr id="9" name="Image 1" descr="preencoded.png"/>
           <p:cNvPicPr>
             <a:picLocks noChangeAspect="1"/>
           </p:cNvPicPr>
@@ -5356,7 +5356,7 @@
       </p:sp>
       <p:pic>
         <p:nvPicPr>
-          <p:cNvPr id="3" name="Image 0" descr="preencoded.png">    </p:cNvPr>
+          <p:cNvPr id="3" name="Image 0" descr="preencoded.png"/>
           <p:cNvPicPr>
             <a:picLocks noChangeAspect="1"/>
           </p:cNvPicPr>
@@ -6037,7 +6037,7 @@
       </p:sp>
       <p:pic>
         <p:nvPicPr>
-          <p:cNvPr id="3" name="Image 0" descr="preencoded.png">    </p:cNvPr>
+          <p:cNvPr id="3" name="Image 0" descr="preencoded.png"/>
           <p:cNvPicPr>
             <a:picLocks noChangeAspect="1"/>
           </p:cNvPicPr>
@@ -6218,7 +6218,7 @@
       </p:sp>
       <p:pic>
         <p:nvPicPr>
-          <p:cNvPr id="9" name="Image 1" descr="preencoded.png">    </p:cNvPr>
+          <p:cNvPr id="9" name="Image 1" descr="preencoded.png"/>
           <p:cNvPicPr>
             <a:picLocks noChangeAspect="1"/>
           </p:cNvPicPr>
@@ -6705,7 +6705,7 @@
       </p:sp>
       <p:pic>
         <p:nvPicPr>
-          <p:cNvPr id="3" name="Image 0" descr="preencoded.png">    </p:cNvPr>
+          <p:cNvPr id="3" name="Image 0" descr="preencoded.png"/>
           <p:cNvPicPr>
             <a:picLocks noChangeAspect="1"/>
           </p:cNvPicPr>
@@ -6891,7 +6891,7 @@
       </p:sp>
       <p:pic>
         <p:nvPicPr>
-          <p:cNvPr id="9" name="Image 1" descr="preencoded.png">    </p:cNvPr>
+          <p:cNvPr id="9" name="Image 1" descr="preencoded.png"/>
           <p:cNvPicPr>
             <a:picLocks noChangeAspect="1"/>
           </p:cNvPicPr>
@@ -7057,7 +7057,7 @@
       </p:sp>
       <p:pic>
         <p:nvPicPr>
-          <p:cNvPr id="14" name="Image 2" descr="preencoded.png">    </p:cNvPr>
+          <p:cNvPr id="14" name="Image 2" descr="preencoded.png"/>
           <p:cNvPicPr>
             <a:picLocks noChangeAspect="1"/>
           </p:cNvPicPr>
@@ -7223,7 +7223,7 @@
       </p:sp>
       <p:pic>
         <p:nvPicPr>
-          <p:cNvPr id="19" name="Image 3" descr="preencoded.png">    </p:cNvPr>
+          <p:cNvPr id="19" name="Image 3" descr="preencoded.png"/>
           <p:cNvPicPr>
             <a:picLocks noChangeAspect="1"/>
           </p:cNvPicPr>
@@ -7518,7 +7518,7 @@
       </p:sp>
       <p:pic>
         <p:nvPicPr>
-          <p:cNvPr id="3" name="Image 0" descr="preencoded.png">    </p:cNvPr>
+          <p:cNvPr id="3" name="Image 0" descr="preencoded.png"/>
           <p:cNvPicPr>
             <a:picLocks noChangeAspect="1"/>
           </p:cNvPicPr>
@@ -7704,7 +7704,7 @@
       </p:sp>
       <p:pic>
         <p:nvPicPr>
-          <p:cNvPr id="9" name="Image 1" descr="preencoded.png">    </p:cNvPr>
+          <p:cNvPr id="9" name="Image 1" descr="preencoded.png"/>
           <p:cNvPicPr>
             <a:picLocks noChangeAspect="1"/>
           </p:cNvPicPr>
@@ -7870,7 +7870,7 @@
       </p:sp>
       <p:pic>
         <p:nvPicPr>
-          <p:cNvPr id="14" name="Image 2" descr="preencoded.png">    </p:cNvPr>
+          <p:cNvPr id="14" name="Image 2" descr="preencoded.png"/>
           <p:cNvPicPr>
             <a:picLocks noChangeAspect="1"/>
           </p:cNvPicPr>
@@ -8036,7 +8036,7 @@
       </p:sp>
       <p:pic>
         <p:nvPicPr>
-          <p:cNvPr id="19" name="Image 3" descr="preencoded.png">    </p:cNvPr>
+          <p:cNvPr id="19" name="Image 3" descr="preencoded.png"/>
           <p:cNvPicPr>
             <a:picLocks noChangeAspect="1"/>
           </p:cNvPicPr>
@@ -8202,7 +8202,7 @@
       </p:sp>
       <p:pic>
         <p:nvPicPr>
-          <p:cNvPr id="24" name="Image 4" descr="preencoded.png">    </p:cNvPr>
+          <p:cNvPr id="24" name="Image 4" descr="preencoded.png"/>
           <p:cNvPicPr>
             <a:picLocks noChangeAspect="1"/>
           </p:cNvPicPr>
@@ -8458,7 +8458,7 @@
       </p:sp>
       <p:pic>
         <p:nvPicPr>
-          <p:cNvPr id="3" name="Image 0" descr="preencoded.png">    </p:cNvPr>
+          <p:cNvPr id="3" name="Image 0" descr="preencoded.png"/>
           <p:cNvPicPr>
             <a:picLocks noChangeAspect="1"/>
           </p:cNvPicPr>
@@ -8644,7 +8644,7 @@
       </p:sp>
       <p:pic>
         <p:nvPicPr>
-          <p:cNvPr id="9" name="Image 1" descr="preencoded.png">    </p:cNvPr>
+          <p:cNvPr id="9" name="Image 1" descr="preencoded.png"/>
           <p:cNvPicPr>
             <a:picLocks noChangeAspect="1"/>
           </p:cNvPicPr>
@@ -8810,7 +8810,7 @@
       </p:sp>
       <p:pic>
         <p:nvPicPr>
-          <p:cNvPr id="14" name="Image 2" descr="preencoded.png">    </p:cNvPr>
+          <p:cNvPr id="14" name="Image 2" descr="preencoded.png"/>
           <p:cNvPicPr>
             <a:picLocks noChangeAspect="1"/>
           </p:cNvPicPr>
